--- a/docs/buildathon/PlutusShield-Wave2-deck.pptx
+++ b/docs/buildathon/PlutusShield-Wave2-deck.pptx
@@ -7156,7 +7156,7 @@
                 </a:solidFill>
                 <a:latin typeface="Georgia"/>
               </a:rPr>
-              <a:t>295 unit tests plus an end-to-end emulator run, all green.</a:t>
+              <a:t>302 unit tests plus an end-to-end emulator run, all green.</a:t>
             </a:r>
           </a:p>
         </p:txBody>
@@ -7282,7 +7282,7 @@
                 </a:solidFill>
                 <a:latin typeface="Georgia"/>
               </a:rPr>
-              <a:t>92</a:t>
+              <a:t>97</a:t>
             </a:r>
           </a:p>
         </p:txBody>
@@ -7324,7 +7324,7 @@
                 </a:solidFill>
                 <a:latin typeface="Helvetica"/>
               </a:rPr>
-              <a:t>SDK: quote engine, codecs, evidence vault, relay</a:t>
+              <a:t>SDK: quote engine, codecs, evidence vault, claim kit, relay</a:t>
             </a:r>
           </a:p>
         </p:txBody>
@@ -7366,7 +7366,7 @@
                 </a:solidFill>
                 <a:latin typeface="Georgia"/>
               </a:rPr>
-              <a:t>55</a:t>
+              <a:t>57</a:t>
             </a:r>
           </a:p>
         </p:txBody>

--- a/docs/buildathon/PlutusShield-Wave2-deck.pptx
+++ b/docs/buildathon/PlutusShield-Wave2-deck.pptx
@@ -7156,7 +7156,7 @@
                 </a:solidFill>
                 <a:latin typeface="Georgia"/>
               </a:rPr>
-              <a:t>302 unit tests plus an end-to-end emulator run, all green.</a:t>
+              <a:t>305 unit tests plus an end-to-end emulator run, all green.</a:t>
             </a:r>
           </a:p>
         </p:txBody>
@@ -7366,7 +7366,7 @@
                 </a:solidFill>
                 <a:latin typeface="Georgia"/>
               </a:rPr>
-              <a:t>57</a:t>
+              <a:t>60</a:t>
             </a:r>
           </a:p>
         </p:txBody>
@@ -7408,7 +7408,7 @@
                 </a:solidFill>
                 <a:latin typeface="Helvetica"/>
               </a:rPr>
-              <a:t>Compact circuit simulation, relay plan, state decode</a:t>
+              <a:t>Compact circuit simulation, claims relay, relay plan, state decode</a:t>
             </a:r>
           </a:p>
         </p:txBody>
@@ -8087,7 +8087,7 @@
                 </a:solidFill>
                 <a:latin typeface="Helvetica"/>
               </a:rPr>
-              <a:t>proveCover and fileClaim straight from the browser wallet.</a:t>
+              <a:t>proveCover and fileClaim straight from the browser wallet (claims already file from the holder's own claim kit).</a:t>
             </a:r>
           </a:p>
           <a:p>

--- a/docs/buildathon/PlutusShield-Wave2-deck.pptx
+++ b/docs/buildathon/PlutusShield-Wave2-deck.pptx
@@ -7156,7 +7156,7 @@
                 </a:solidFill>
                 <a:latin typeface="Georgia"/>
               </a:rPr>
-              <a:t>305 unit tests plus an end-to-end emulator run, all green.</a:t>
+              <a:t>315 unit tests plus an end-to-end emulator run, all green.</a:t>
             </a:r>
           </a:p>
         </p:txBody>
@@ -8087,7 +8087,7 @@
                 </a:solidFill>
                 <a:latin typeface="Helvetica"/>
               </a:rPr>
-              <a:t>proveCover and fileClaim straight from the browser wallet (claims already file from the holder's own claim kit).</a:t>
+              <a:t>Lace Midnight connect is live on the site; next is proveCover / fileClaim from that browser wallet (claims already file from the holder's claim kit).</a:t>
             </a:r>
           </a:p>
           <a:p>

--- a/docs/buildathon/PlutusShield-Wave2-deck.pptx
+++ b/docs/buildathon/PlutusShield-Wave2-deck.pptx
@@ -7156,7 +7156,7 @@
                 </a:solidFill>
                 <a:latin typeface="Georgia"/>
               </a:rPr>
-              <a:t>315 unit tests plus an end-to-end emulator run, all green.</a:t>
+              <a:t>327 unit tests plus an end-to-end emulator run, all green.</a:t>
             </a:r>
           </a:p>
         </p:txBody>
@@ -7282,7 +7282,7 @@
                 </a:solidFill>
                 <a:latin typeface="Georgia"/>
               </a:rPr>
-              <a:t>97</a:t>
+              <a:t>119</a:t>
             </a:r>
           </a:p>
         </p:txBody>
@@ -7324,7 +7324,7 @@
                 </a:solidFill>
                 <a:latin typeface="Helvetica"/>
               </a:rPr>
-              <a:t>SDK: quote engine, codecs, evidence vault, claim kit, relay</a:t>
+              <a:t>SDK: quote engine, codecs, evidence vault, claim kit, Lace, ZK fetch</a:t>
             </a:r>
           </a:p>
         </p:txBody>
@@ -8087,7 +8087,7 @@
                 </a:solidFill>
                 <a:latin typeface="Helvetica"/>
               </a:rPr>
-              <a:t>Lace Midnight connect is live on the site; next is proveCover / fileClaim from that browser wallet (claims already file from the holder's claim kit).</a:t>
+              <a:t>Lace circuit-submit + ZK asset probe (verifier/zkir on Pages) for proveCover / fileClaim on /claim/evidence; Compact prove still needs midnight-js injection — claim kit files today.</a:t>
             </a:r>
           </a:p>
           <a:p>

--- a/docs/buildathon/PlutusShield-Wave2-deck.pptx
+++ b/docs/buildathon/PlutusShield-Wave2-deck.pptx
@@ -5896,7 +5896,26 @@
                 </a:solidFill>
                 <a:latin typeface="Helvetica"/>
               </a:rPr>
-              <a:t>Mirrors all 3 mirrorable Cardano Preview policies.</a:t>
+              <a:t>Second: a holder-filed claim (claim kit), seats 1 + 3 approve, paid on Cardano.</a:t>
+            </a:r>
+          </a:p>
+          <a:p>
+            <a:pPr algn="l">
+              <a:lnSpc>
+                <a:spcPct val="110000"/>
+              </a:lnSpc>
+              <a:spcAft>
+                <a:spcPts val="675"/>
+              </a:spcAft>
+            </a:pPr>
+            <a:r>
+              <a:rPr sz="1500" b="0">
+                <a:solidFill>
+                  <a:srgbClr val="9AA0BD"/>
+                </a:solidFill>
+                <a:latin typeface="Helvetica"/>
+              </a:rPr>
+              <a:t>4 Cardano Preview policies registered on v2.</a:t>
             </a:r>
           </a:p>
         </p:txBody>
@@ -6145,30 +6164,30 @@
         </p:nvSpPr>
         <p:spPr>
           <a:xfrm>
-            <a:off x="731520" y="2148840"/>
-            <a:ext cx="4206240" cy="548640"/>
-          </a:xfrm>
-          <a:prstGeom prst="rect">
-            <a:avLst/>
-          </a:prstGeom>
-          <a:noFill/>
-        </p:spPr>
-        <p:txBody>
-          <a:bodyPr wrap="square">
-            <a:spAutoFit/>
-          </a:bodyPr>
-          <a:lstStyle/>
-          <a:p>
-            <a:pPr algn="l">
-              <a:lnSpc>
-                <a:spcPct val="110000"/>
-              </a:lnSpc>
-              <a:spcAft>
-                <a:spcPts val="765"/>
-              </a:spcAft>
-            </a:pPr>
-            <a:r>
-              <a:rPr sz="1700" b="0">
+            <a:off x="731520" y="2103120"/>
+            <a:ext cx="4206240" cy="457200"/>
+          </a:xfrm>
+          <a:prstGeom prst="rect">
+            <a:avLst/>
+          </a:prstGeom>
+          <a:noFill/>
+        </p:spPr>
+        <p:txBody>
+          <a:bodyPr wrap="square">
+            <a:spAutoFit/>
+          </a:bodyPr>
+          <a:lstStyle/>
+          <a:p>
+            <a:pPr algn="l">
+              <a:lnSpc>
+                <a:spcPct val="110000"/>
+              </a:lnSpc>
+              <a:spcAft>
+                <a:spcPts val="720"/>
+              </a:spcAft>
+            </a:pPr>
+            <a:r>
+              <a:rPr sz="1600" b="0">
                 <a:solidFill>
                   <a:srgbClr val="E9EBF5"/>
                 </a:solidFill>
@@ -6187,30 +6206,30 @@
         </p:nvSpPr>
         <p:spPr>
           <a:xfrm>
-            <a:off x="5029200" y="2148840"/>
-            <a:ext cx="6492240" cy="548640"/>
-          </a:xfrm>
-          <a:prstGeom prst="rect">
-            <a:avLst/>
-          </a:prstGeom>
-          <a:noFill/>
-        </p:spPr>
-        <p:txBody>
-          <a:bodyPr wrap="square">
-            <a:spAutoFit/>
-          </a:bodyPr>
-          <a:lstStyle/>
-          <a:p>
-            <a:pPr algn="l">
-              <a:lnSpc>
-                <a:spcPct val="110000"/>
-              </a:lnSpc>
-              <a:spcAft>
-                <a:spcPts val="675"/>
-              </a:spcAft>
-            </a:pPr>
-            <a:r>
-              <a:rPr sz="1500" b="0">
+            <a:off x="5029200" y="2103120"/>
+            <a:ext cx="6492240" cy="457200"/>
+          </a:xfrm>
+          <a:prstGeom prst="rect">
+            <a:avLst/>
+          </a:prstGeom>
+          <a:noFill/>
+        </p:spPr>
+        <p:txBody>
+          <a:bodyPr wrap="square">
+            <a:spAutoFit/>
+          </a:bodyPr>
+          <a:lstStyle/>
+          <a:p>
+            <a:pPr algn="l">
+              <a:lnSpc>
+                <a:spcPct val="110000"/>
+              </a:lnSpc>
+              <a:spcAft>
+                <a:spcPts val="630"/>
+              </a:spcAft>
+            </a:pPr>
+            <a:r>
+              <a:rPr sz="1400" b="0">
                 <a:solidFill>
                   <a:srgbClr val="9AA0BD"/>
                 </a:solidFill>
@@ -6229,35 +6248,119 @@
         </p:nvSpPr>
         <p:spPr>
           <a:xfrm>
-            <a:off x="731520" y="2807208"/>
-            <a:ext cx="4206240" cy="548640"/>
-          </a:xfrm>
-          <a:prstGeom prst="rect">
-            <a:avLst/>
-          </a:prstGeom>
-          <a:noFill/>
-        </p:spPr>
-        <p:txBody>
-          <a:bodyPr wrap="square">
-            <a:spAutoFit/>
-          </a:bodyPr>
-          <a:lstStyle/>
-          <a:p>
-            <a:pPr algn="l">
-              <a:lnSpc>
-                <a:spcPct val="110000"/>
-              </a:lnSpc>
-              <a:spcAft>
-                <a:spcPts val="765"/>
-              </a:spcAft>
-            </a:pPr>
-            <a:r>
-              <a:rPr sz="1700" b="0">
+            <a:off x="731520" y="2615184"/>
+            <a:ext cx="4206240" cy="457200"/>
+          </a:xfrm>
+          <a:prstGeom prst="rect">
+            <a:avLst/>
+          </a:prstGeom>
+          <a:noFill/>
+        </p:spPr>
+        <p:txBody>
+          <a:bodyPr wrap="square">
+            <a:spAutoFit/>
+          </a:bodyPr>
+          <a:lstStyle/>
+          <a:p>
+            <a:pPr algn="l">
+              <a:lnSpc>
+                <a:spcPct val="110000"/>
+              </a:lnSpc>
+              <a:spcAft>
+                <a:spcPts val="720"/>
+              </a:spcAft>
+            </a:pPr>
+            <a:r>
+              <a:rPr sz="1600" b="0">
                 <a:solidFill>
                   <a:srgbClr val="E9EBF5"/>
                 </a:solidFill>
                 <a:latin typeface="Helvetica"/>
               </a:rPr>
+              <a:t>Exploit cover in the browser</a:t>
+            </a:r>
+          </a:p>
+        </p:txBody>
+      </p:sp>
+      <p:sp>
+        <p:nvSpPr>
+          <p:cNvPr id="7" name="TextBox 6"/>
+          <p:cNvSpPr txBox="1"/>
+          <p:nvPr/>
+        </p:nvSpPr>
+        <p:spPr>
+          <a:xfrm>
+            <a:off x="5029200" y="2615184"/>
+            <a:ext cx="6492240" cy="457200"/>
+          </a:xfrm>
+          <a:prstGeom prst="rect">
+            <a:avLst/>
+          </a:prstGeom>
+          <a:noFill/>
+        </p:spPr>
+        <p:txBody>
+          <a:bodyPr wrap="square">
+            <a:spAutoFit/>
+          </a:bodyPr>
+          <a:lstStyle/>
+          <a:p>
+            <a:pPr algn="l">
+              <a:lnSpc>
+                <a:spcPct val="110000"/>
+              </a:lnSpc>
+              <a:spcAft>
+                <a:spcPts val="630"/>
+              </a:spcAft>
+            </a:pPr>
+            <a:r>
+              <a:rPr sz="1400" b="0">
+                <a:solidFill>
+                  <a:srgbClr val="9AA0BD"/>
+                </a:solidFill>
+                <a:latin typeface="Helvetica"/>
+              </a:rPr>
+              <a:t>10 tADA bought with the website's own Buy builder, Buy 3c1fc629…</a:t>
+            </a:r>
+          </a:p>
+        </p:txBody>
+      </p:sp>
+      <p:sp>
+        <p:nvSpPr>
+          <p:cNvPr id="8" name="TextBox 7"/>
+          <p:cNvSpPr txBox="1"/>
+          <p:nvPr/>
+        </p:nvSpPr>
+        <p:spPr>
+          <a:xfrm>
+            <a:off x="731520" y="3127248"/>
+            <a:ext cx="4206240" cy="457200"/>
+          </a:xfrm>
+          <a:prstGeom prst="rect">
+            <a:avLst/>
+          </a:prstGeom>
+          <a:noFill/>
+        </p:spPr>
+        <p:txBody>
+          <a:bodyPr wrap="square">
+            <a:spAutoFit/>
+          </a:bodyPr>
+          <a:lstStyle/>
+          <a:p>
+            <a:pPr algn="l">
+              <a:lnSpc>
+                <a:spcPct val="110000"/>
+              </a:lnSpc>
+              <a:spcAft>
+                <a:spcPts val="720"/>
+              </a:spcAft>
+            </a:pPr>
+            <a:r>
+              <a:rPr sz="1600" b="0">
+                <a:solidFill>
+                  <a:srgbClr val="E9EBF5"/>
+                </a:solidFill>
+                <a:latin typeface="Helvetica"/>
+              </a:rPr>
               <a:t>First exploit claim paid</a:t>
             </a:r>
           </a:p>
@@ -6265,36 +6368,36 @@
       </p:sp>
       <p:sp>
         <p:nvSpPr>
-          <p:cNvPr id="7" name="TextBox 6"/>
-          <p:cNvSpPr txBox="1"/>
-          <p:nvPr/>
-        </p:nvSpPr>
-        <p:spPr>
-          <a:xfrm>
-            <a:off x="5029200" y="2807208"/>
-            <a:ext cx="6492240" cy="548640"/>
-          </a:xfrm>
-          <a:prstGeom prst="rect">
-            <a:avLst/>
-          </a:prstGeom>
-          <a:noFill/>
-        </p:spPr>
-        <p:txBody>
-          <a:bodyPr wrap="square">
-            <a:spAutoFit/>
-          </a:bodyPr>
-          <a:lstStyle/>
-          <a:p>
-            <a:pPr algn="l">
-              <a:lnSpc>
-                <a:spcPct val="110000"/>
-              </a:lnSpc>
-              <a:spcAft>
-                <a:spcPts val="675"/>
-              </a:spcAft>
-            </a:pPr>
-            <a:r>
-              <a:rPr sz="1500" b="0">
+          <p:cNvPr id="9" name="TextBox 8"/>
+          <p:cNvSpPr txBox="1"/>
+          <p:nvPr/>
+        </p:nvSpPr>
+        <p:spPr>
+          <a:xfrm>
+            <a:off x="5029200" y="3127248"/>
+            <a:ext cx="6492240" cy="457200"/>
+          </a:xfrm>
+          <a:prstGeom prst="rect">
+            <a:avLst/>
+          </a:prstGeom>
+          <a:noFill/>
+        </p:spPr>
+        <p:txBody>
+          <a:bodyPr wrap="square">
+            <a:spAutoFit/>
+          </a:bodyPr>
+          <a:lstStyle/>
+          <a:p>
+            <a:pPr algn="l">
+              <a:lnSpc>
+                <a:spcPct val="110000"/>
+              </a:lnSpc>
+              <a:spcAft>
+                <a:spcPts val="630"/>
+              </a:spcAft>
+            </a:pPr>
+            <a:r>
+              <a:rPr sz="1400" b="0">
                 <a:solidFill>
                   <a:srgbClr val="9AA0BD"/>
                 </a:solidFill>
@@ -6307,36 +6410,36 @@
       </p:sp>
       <p:sp>
         <p:nvSpPr>
-          <p:cNvPr id="8" name="TextBox 7"/>
-          <p:cNvSpPr txBox="1"/>
-          <p:nvPr/>
-        </p:nvSpPr>
-        <p:spPr>
-          <a:xfrm>
-            <a:off x="731520" y="3465576"/>
-            <a:ext cx="4206240" cy="548640"/>
-          </a:xfrm>
-          <a:prstGeom prst="rect">
-            <a:avLst/>
-          </a:prstGeom>
-          <a:noFill/>
-        </p:spPr>
-        <p:txBody>
-          <a:bodyPr wrap="square">
-            <a:spAutoFit/>
-          </a:bodyPr>
-          <a:lstStyle/>
-          <a:p>
-            <a:pPr algn="l">
-              <a:lnSpc>
-                <a:spcPct val="110000"/>
-              </a:lnSpc>
-              <a:spcAft>
-                <a:spcPts val="765"/>
-              </a:spcAft>
-            </a:pPr>
-            <a:r>
-              <a:rPr sz="1700" b="0">
+          <p:cNvPr id="10" name="TextBox 9"/>
+          <p:cNvSpPr txBox="1"/>
+          <p:nvPr/>
+        </p:nvSpPr>
+        <p:spPr>
+          <a:xfrm>
+            <a:off x="731520" y="3639312"/>
+            <a:ext cx="4206240" cy="457200"/>
+          </a:xfrm>
+          <a:prstGeom prst="rect">
+            <a:avLst/>
+          </a:prstGeom>
+          <a:noFill/>
+        </p:spPr>
+        <p:txBody>
+          <a:bodyPr wrap="square">
+            <a:spAutoFit/>
+          </a:bodyPr>
+          <a:lstStyle/>
+          <a:p>
+            <a:pPr algn="l">
+              <a:lnSpc>
+                <a:spcPct val="110000"/>
+              </a:lnSpc>
+              <a:spcAft>
+                <a:spcPts val="720"/>
+              </a:spcAft>
+            </a:pPr>
+            <a:r>
+              <a:rPr sz="1600" b="0">
                 <a:solidFill>
                   <a:srgbClr val="E9EBF5"/>
                 </a:solidFill>
@@ -6349,36 +6452,36 @@
       </p:sp>
       <p:sp>
         <p:nvSpPr>
-          <p:cNvPr id="9" name="TextBox 8"/>
-          <p:cNvSpPr txBox="1"/>
-          <p:nvPr/>
-        </p:nvSpPr>
-        <p:spPr>
-          <a:xfrm>
-            <a:off x="5029200" y="3465576"/>
-            <a:ext cx="6492240" cy="548640"/>
-          </a:xfrm>
-          <a:prstGeom prst="rect">
-            <a:avLst/>
-          </a:prstGeom>
-          <a:noFill/>
-        </p:spPr>
-        <p:txBody>
-          <a:bodyPr wrap="square">
-            <a:spAutoFit/>
-          </a:bodyPr>
-          <a:lstStyle/>
-          <a:p>
-            <a:pPr algn="l">
-              <a:lnSpc>
-                <a:spcPct val="110000"/>
-              </a:lnSpc>
-              <a:spcAft>
-                <a:spcPts val="675"/>
-              </a:spcAft>
-            </a:pPr>
-            <a:r>
-              <a:rPr sz="1500" b="0">
+          <p:cNvPr id="11" name="TextBox 10"/>
+          <p:cNvSpPr txBox="1"/>
+          <p:nvPr/>
+        </p:nvSpPr>
+        <p:spPr>
+          <a:xfrm>
+            <a:off x="5029200" y="3639312"/>
+            <a:ext cx="6492240" cy="457200"/>
+          </a:xfrm>
+          <a:prstGeom prst="rect">
+            <a:avLst/>
+          </a:prstGeom>
+          <a:noFill/>
+        </p:spPr>
+        <p:txBody>
+          <a:bodyPr wrap="square">
+            <a:spAutoFit/>
+          </a:bodyPr>
+          <a:lstStyle/>
+          <a:p>
+            <a:pPr algn="l">
+              <a:lnSpc>
+                <a:spcPct val="110000"/>
+              </a:lnSpc>
+              <a:spcAft>
+                <a:spcPts val="630"/>
+              </a:spcAft>
+            </a:pPr>
+            <a:r>
+              <a:rPr sz="1400" b="0">
                 <a:solidFill>
                   <a:srgbClr val="9AA0BD"/>
                 </a:solidFill>
@@ -6391,41 +6494,125 @@
       </p:sp>
       <p:sp>
         <p:nvSpPr>
-          <p:cNvPr id="10" name="TextBox 9"/>
-          <p:cNvSpPr txBox="1"/>
-          <p:nvPr/>
-        </p:nvSpPr>
-        <p:spPr>
-          <a:xfrm>
-            <a:off x="731520" y="4123944"/>
-            <a:ext cx="4206240" cy="548640"/>
-          </a:xfrm>
-          <a:prstGeom prst="rect">
-            <a:avLst/>
-          </a:prstGeom>
-          <a:noFill/>
-        </p:spPr>
-        <p:txBody>
-          <a:bodyPr wrap="square">
-            <a:spAutoFit/>
-          </a:bodyPr>
-          <a:lstStyle/>
-          <a:p>
-            <a:pPr algn="l">
-              <a:lnSpc>
-                <a:spcPct val="110000"/>
-              </a:lnSpc>
-              <a:spcAft>
-                <a:spcPts val="765"/>
-              </a:spcAft>
-            </a:pPr>
-            <a:r>
-              <a:rPr sz="1700" b="0">
+          <p:cNvPr id="12" name="TextBox 11"/>
+          <p:cNvSpPr txBox="1"/>
+          <p:nvPr/>
+        </p:nvSpPr>
+        <p:spPr>
+          <a:xfrm>
+            <a:off x="731520" y="4151376"/>
+            <a:ext cx="4206240" cy="457200"/>
+          </a:xfrm>
+          <a:prstGeom prst="rect">
+            <a:avLst/>
+          </a:prstGeom>
+          <a:noFill/>
+        </p:spPr>
+        <p:txBody>
+          <a:bodyPr wrap="square">
+            <a:spAutoFit/>
+          </a:bodyPr>
+          <a:lstStyle/>
+          <a:p>
+            <a:pPr algn="l">
+              <a:lnSpc>
+                <a:spcPct val="110000"/>
+              </a:lnSpc>
+              <a:spcAft>
+                <a:spcPts val="720"/>
+              </a:spcAft>
+            </a:pPr>
+            <a:r>
+              <a:rPr sz="1600" b="0">
                 <a:solidFill>
                   <a:srgbClr val="E9EBF5"/>
                 </a:solidFill>
                 <a:latin typeface="Helvetica"/>
               </a:rPr>
+              <a:t>Holder-filed claim paid</a:t>
+            </a:r>
+          </a:p>
+        </p:txBody>
+      </p:sp>
+      <p:sp>
+        <p:nvSpPr>
+          <p:cNvPr id="13" name="TextBox 12"/>
+          <p:cNvSpPr txBox="1"/>
+          <p:nvPr/>
+        </p:nvSpPr>
+        <p:spPr>
+          <a:xfrm>
+            <a:off x="5029200" y="4151376"/>
+            <a:ext cx="6492240" cy="457200"/>
+          </a:xfrm>
+          <a:prstGeom prst="rect">
+            <a:avLst/>
+          </a:prstGeom>
+          <a:noFill/>
+        </p:spPr>
+        <p:txBody>
+          <a:bodyPr wrap="square">
+            <a:spAutoFit/>
+          </a:bodyPr>
+          <a:lstStyle/>
+          <a:p>
+            <a:pPr algn="l">
+              <a:lnSpc>
+                <a:spcPct val="110000"/>
+              </a:lnSpc>
+              <a:spcAft>
+                <a:spcPts val="630"/>
+              </a:spcAft>
+            </a:pPr>
+            <a:r>
+              <a:rPr sz="1400" b="0">
+                <a:solidFill>
+                  <a:srgbClr val="9AA0BD"/>
+                </a:solidFill>
+                <a:latin typeface="Helvetica"/>
+              </a:rPr>
+              <a:t>Claim kit fileClaim 00989a6a…, v2 voteClaim 2 of 3, 25 tADA Settle dbf0ba7a…</a:t>
+            </a:r>
+          </a:p>
+        </p:txBody>
+      </p:sp>
+      <p:sp>
+        <p:nvSpPr>
+          <p:cNvPr id="14" name="TextBox 13"/>
+          <p:cNvSpPr txBox="1"/>
+          <p:nvPr/>
+        </p:nvSpPr>
+        <p:spPr>
+          <a:xfrm>
+            <a:off x="731520" y="4663440"/>
+            <a:ext cx="4206240" cy="457200"/>
+          </a:xfrm>
+          <a:prstGeom prst="rect">
+            <a:avLst/>
+          </a:prstGeom>
+          <a:noFill/>
+        </p:spPr>
+        <p:txBody>
+          <a:bodyPr wrap="square">
+            <a:spAutoFit/>
+          </a:bodyPr>
+          <a:lstStyle/>
+          <a:p>
+            <a:pPr algn="l">
+              <a:lnSpc>
+                <a:spcPct val="110000"/>
+              </a:lnSpc>
+              <a:spcAft>
+                <a:spcPts val="720"/>
+              </a:spcAft>
+            </a:pPr>
+            <a:r>
+              <a:rPr sz="1600" b="0">
+                <a:solidFill>
+                  <a:srgbClr val="E9EBF5"/>
+                </a:solidFill>
+                <a:latin typeface="Helvetica"/>
+              </a:rPr>
               <a:t>1-of-3 payout attempt</a:t>
             </a:r>
           </a:p>
@@ -6433,36 +6620,36 @@
       </p:sp>
       <p:sp>
         <p:nvSpPr>
-          <p:cNvPr id="11" name="TextBox 10"/>
-          <p:cNvSpPr txBox="1"/>
-          <p:nvPr/>
-        </p:nvSpPr>
-        <p:spPr>
-          <a:xfrm>
-            <a:off x="5029200" y="4123944"/>
-            <a:ext cx="6492240" cy="548640"/>
-          </a:xfrm>
-          <a:prstGeom prst="rect">
-            <a:avLst/>
-          </a:prstGeom>
-          <a:noFill/>
-        </p:spPr>
-        <p:txBody>
-          <a:bodyPr wrap="square">
-            <a:spAutoFit/>
-          </a:bodyPr>
-          <a:lstStyle/>
-          <a:p>
-            <a:pPr algn="l">
-              <a:lnSpc>
-                <a:spcPct val="110000"/>
-              </a:lnSpc>
-              <a:spcAft>
-                <a:spcPts val="675"/>
-              </a:spcAft>
-            </a:pPr>
-            <a:r>
-              <a:rPr sz="1500" b="0">
+          <p:cNvPr id="15" name="TextBox 14"/>
+          <p:cNvSpPr txBox="1"/>
+          <p:nvPr/>
+        </p:nvSpPr>
+        <p:spPr>
+          <a:xfrm>
+            <a:off x="5029200" y="4663440"/>
+            <a:ext cx="6492240" cy="457200"/>
+          </a:xfrm>
+          <a:prstGeom prst="rect">
+            <a:avLst/>
+          </a:prstGeom>
+          <a:noFill/>
+        </p:spPr>
+        <p:txBody>
+          <a:bodyPr wrap="square">
+            <a:spAutoFit/>
+          </a:bodyPr>
+          <a:lstStyle/>
+          <a:p>
+            <a:pPr algn="l">
+              <a:lnSpc>
+                <a:spcPct val="110000"/>
+              </a:lnSpc>
+              <a:spcAft>
+                <a:spcPts val="630"/>
+              </a:spcAft>
+            </a:pPr>
+            <a:r>
+              <a:rPr sz="1400" b="0">
                 <a:solidFill>
                   <a:srgbClr val="9AA0BD"/>
                 </a:solidFill>
@@ -6475,36 +6662,36 @@
       </p:sp>
       <p:sp>
         <p:nvSpPr>
-          <p:cNvPr id="12" name="TextBox 11"/>
-          <p:cNvSpPr txBox="1"/>
-          <p:nvPr/>
-        </p:nvSpPr>
-        <p:spPr>
-          <a:xfrm>
-            <a:off x="731520" y="4782312"/>
-            <a:ext cx="4206240" cy="548640"/>
-          </a:xfrm>
-          <a:prstGeom prst="rect">
-            <a:avLst/>
-          </a:prstGeom>
-          <a:noFill/>
-        </p:spPr>
-        <p:txBody>
-          <a:bodyPr wrap="square">
-            <a:spAutoFit/>
-          </a:bodyPr>
-          <a:lstStyle/>
-          <a:p>
-            <a:pPr algn="l">
-              <a:lnSpc>
-                <a:spcPct val="110000"/>
-              </a:lnSpc>
-              <a:spcAft>
-                <a:spcPts val="765"/>
-              </a:spcAft>
-            </a:pPr>
-            <a:r>
-              <a:rPr sz="1700" b="0">
+          <p:cNvPr id="16" name="TextBox 15"/>
+          <p:cNvSpPr txBox="1"/>
+          <p:nvPr/>
+        </p:nvSpPr>
+        <p:spPr>
+          <a:xfrm>
+            <a:off x="731520" y="5175504"/>
+            <a:ext cx="4206240" cy="457200"/>
+          </a:xfrm>
+          <a:prstGeom prst="rect">
+            <a:avLst/>
+          </a:prstGeom>
+          <a:noFill/>
+        </p:spPr>
+        <p:txBody>
+          <a:bodyPr wrap="square">
+            <a:spAutoFit/>
+          </a:bodyPr>
+          <a:lstStyle/>
+          <a:p>
+            <a:pPr algn="l">
+              <a:lnSpc>
+                <a:spcPct val="110000"/>
+              </a:lnSpc>
+              <a:spcAft>
+                <a:spcPts val="720"/>
+              </a:spcAft>
+            </a:pPr>
+            <a:r>
+              <a:rPr sz="1600" b="0">
                 <a:solidFill>
                   <a:srgbClr val="E9EBF5"/>
                 </a:solidFill>
@@ -6517,78 +6704,78 @@
       </p:sp>
       <p:sp>
         <p:nvSpPr>
-          <p:cNvPr id="13" name="TextBox 12"/>
-          <p:cNvSpPr txBox="1"/>
-          <p:nvPr/>
-        </p:nvSpPr>
-        <p:spPr>
-          <a:xfrm>
-            <a:off x="5029200" y="4782312"/>
-            <a:ext cx="6492240" cy="548640"/>
-          </a:xfrm>
-          <a:prstGeom prst="rect">
-            <a:avLst/>
-          </a:prstGeom>
-          <a:noFill/>
-        </p:spPr>
-        <p:txBody>
-          <a:bodyPr wrap="square">
-            <a:spAutoFit/>
-          </a:bodyPr>
-          <a:lstStyle/>
-          <a:p>
-            <a:pPr algn="l">
-              <a:lnSpc>
-                <a:spcPct val="110000"/>
-              </a:lnSpc>
-              <a:spcAft>
-                <a:spcPts val="675"/>
-              </a:spcAft>
-            </a:pPr>
-            <a:r>
-              <a:rPr sz="1500" b="0">
+          <p:cNvPr id="17" name="TextBox 16"/>
+          <p:cNvSpPr txBox="1"/>
+          <p:nvPr/>
+        </p:nvSpPr>
+        <p:spPr>
+          <a:xfrm>
+            <a:off x="5029200" y="5175504"/>
+            <a:ext cx="6492240" cy="457200"/>
+          </a:xfrm>
+          <a:prstGeom prst="rect">
+            <a:avLst/>
+          </a:prstGeom>
+          <a:noFill/>
+        </p:spPr>
+        <p:txBody>
+          <a:bodyPr wrap="square">
+            <a:spAutoFit/>
+          </a:bodyPr>
+          <a:lstStyle/>
+          <a:p>
+            <a:pPr algn="l">
+              <a:lnSpc>
+                <a:spcPct val="110000"/>
+              </a:lnSpc>
+              <a:spcAft>
+                <a:spcPts val="630"/>
+              </a:spcAft>
+            </a:pPr>
+            <a:r>
+              <a:rPr sz="1400" b="0">
                 <a:solidFill>
                   <a:srgbClr val="9AA0BD"/>
                 </a:solidFill>
                 <a:latin typeface="Helvetica"/>
               </a:rPr>
-              <a:t>45 recorded live publishes to 3 Preview feeds, latest 99.84% (Oct 12)</a:t>
-            </a:r>
-          </a:p>
-        </p:txBody>
-      </p:sp>
-      <p:sp>
-        <p:nvSpPr>
-          <p:cNvPr id="14" name="TextBox 13"/>
-          <p:cNvSpPr txBox="1"/>
-          <p:nvPr/>
-        </p:nvSpPr>
-        <p:spPr>
-          <a:xfrm>
-            <a:off x="731520" y="5440679"/>
-            <a:ext cx="4206240" cy="548640"/>
-          </a:xfrm>
-          <a:prstGeom prst="rect">
-            <a:avLst/>
-          </a:prstGeom>
-          <a:noFill/>
-        </p:spPr>
-        <p:txBody>
-          <a:bodyPr wrap="square">
-            <a:spAutoFit/>
-          </a:bodyPr>
-          <a:lstStyle/>
-          <a:p>
-            <a:pPr algn="l">
-              <a:lnSpc>
-                <a:spcPct val="110000"/>
-              </a:lnSpc>
-              <a:spcAft>
-                <a:spcPts val="765"/>
-              </a:spcAft>
-            </a:pPr>
-            <a:r>
-              <a:rPr sz="1700" b="0">
+              <a:t>52 recorded live publishes to 3 Preview feeds, latest 99.97% (Oct 12)</a:t>
+            </a:r>
+          </a:p>
+        </p:txBody>
+      </p:sp>
+      <p:sp>
+        <p:nvSpPr>
+          <p:cNvPr id="18" name="TextBox 17"/>
+          <p:cNvSpPr txBox="1"/>
+          <p:nvPr/>
+        </p:nvSpPr>
+        <p:spPr>
+          <a:xfrm>
+            <a:off x="731520" y="5687568"/>
+            <a:ext cx="4206240" cy="457200"/>
+          </a:xfrm>
+          <a:prstGeom prst="rect">
+            <a:avLst/>
+          </a:prstGeom>
+          <a:noFill/>
+        </p:spPr>
+        <p:txBody>
+          <a:bodyPr wrap="square">
+            <a:spAutoFit/>
+          </a:bodyPr>
+          <a:lstStyle/>
+          <a:p>
+            <a:pPr algn="l">
+              <a:lnSpc>
+                <a:spcPct val="110000"/>
+              </a:lnSpc>
+              <a:spcAft>
+                <a:spcPts val="720"/>
+              </a:spcAft>
+            </a:pPr>
+            <a:r>
+              <a:rPr sz="1600" b="0">
                 <a:solidFill>
                   <a:srgbClr val="E9EBF5"/>
                 </a:solidFill>
@@ -6601,49 +6788,49 @@
       </p:sp>
       <p:sp>
         <p:nvSpPr>
-          <p:cNvPr id="15" name="TextBox 14"/>
-          <p:cNvSpPr txBox="1"/>
-          <p:nvPr/>
-        </p:nvSpPr>
-        <p:spPr>
-          <a:xfrm>
-            <a:off x="5029200" y="5440679"/>
-            <a:ext cx="6492240" cy="548640"/>
-          </a:xfrm>
-          <a:prstGeom prst="rect">
-            <a:avLst/>
-          </a:prstGeom>
-          <a:noFill/>
-        </p:spPr>
-        <p:txBody>
-          <a:bodyPr wrap="square">
-            <a:spAutoFit/>
-          </a:bodyPr>
-          <a:lstStyle/>
-          <a:p>
-            <a:pPr algn="l">
-              <a:lnSpc>
-                <a:spcPct val="110000"/>
-              </a:lnSpc>
-              <a:spcAft>
-                <a:spcPts val="675"/>
-              </a:spcAft>
-            </a:pPr>
-            <a:r>
-              <a:rPr sz="1500" b="0">
+          <p:cNvPr id="19" name="TextBox 18"/>
+          <p:cNvSpPr txBox="1"/>
+          <p:nvPr/>
+        </p:nvSpPr>
+        <p:spPr>
+          <a:xfrm>
+            <a:off x="5029200" y="5687568"/>
+            <a:ext cx="6492240" cy="457200"/>
+          </a:xfrm>
+          <a:prstGeom prst="rect">
+            <a:avLst/>
+          </a:prstGeom>
+          <a:noFill/>
+        </p:spPr>
+        <p:txBody>
+          <a:bodyPr wrap="square">
+            <a:spAutoFit/>
+          </a:bodyPr>
+          <a:lstStyle/>
+          <a:p>
+            <a:pPr algn="l">
+              <a:lnSpc>
+                <a:spcPct val="110000"/>
+              </a:lnSpc>
+              <a:spcAft>
+                <a:spcPts val="630"/>
+              </a:spcAft>
+            </a:pPr>
+            <a:r>
+              <a:rPr sz="1400" b="0">
                 <a:solidFill>
                   <a:srgbClr val="9AA0BD"/>
                 </a:solidFill>
                 <a:latin typeface="Helvetica"/>
               </a:rPr>
-              <a:t>registerPolicy + proveCover on Preprod for 5 policies, readable via Blockfrost</a:t>
-            </a:r>
-          </a:p>
-        </p:txBody>
-      </p:sp>
-      <p:sp>
-        <p:nvSpPr>
-          <p:cNvPr id="16" name="TextBox 15"/>
+              <a:t>registerPolicy + proveCover on Preprod (v1 + v2), readable via Blockfrost</a:t>
+            </a:r>
+          </a:p>
+        </p:txBody>
+      </p:sp>
+      <p:sp>
+        <p:nvSpPr>
+          <p:cNvPr id="20" name="TextBox 19"/>
           <p:cNvSpPr txBox="1"/>
           <p:nvPr/>
         </p:nvSpPr>
@@ -6685,7 +6872,7 @@
       </p:sp>
       <p:sp>
         <p:nvSpPr>
-          <p:cNvPr id="17" name="TextBox 16"/>
+          <p:cNvPr id="21" name="TextBox 20"/>
           <p:cNvSpPr txBox="1"/>
           <p:nvPr/>
         </p:nvSpPr>
@@ -7156,7 +7343,7 @@
                 </a:solidFill>
                 <a:latin typeface="Georgia"/>
               </a:rPr>
-              <a:t>327 unit tests plus an end-to-end emulator run, all green.</a:t>
+              <a:t>334 unit tests plus an end-to-end emulator run, all green.</a:t>
             </a:r>
           </a:p>
         </p:txBody>
@@ -7282,7 +7469,7 @@
                 </a:solidFill>
                 <a:latin typeface="Georgia"/>
               </a:rPr>
-              <a:t>119</a:t>
+              <a:t>126</a:t>
             </a:r>
           </a:p>
         </p:txBody>
@@ -7324,7 +7511,7 @@
                 </a:solidFill>
                 <a:latin typeface="Helvetica"/>
               </a:rPr>
-              <a:t>SDK: quote engine, codecs, evidence vault, claim kit, Lace, ZK fetch</a:t>
+              <a:t>SDK: quote engine, codecs, evidence vault, claim kit, Lace, prove bridge</a:t>
             </a:r>
           </a:p>
         </p:txBody>
@@ -7534,7 +7721,7 @@
                 </a:solidFill>
                 <a:latin typeface="Helvetica"/>
               </a:rPr>
-              <a:t>Lucid emulator e2e: pool, buy, settle, expire, exploit 2-of-3, and every 1-of-3 combination rejected.</a:t>
+              <a:t>Lucid emulator e2e: pool, buy, settle, expire, exploit 2-of-3, every 1-of-3 combination rejected, exploit release.</a:t>
             </a:r>
           </a:p>
           <a:p>
@@ -7553,7 +7740,7 @@
                 </a:solidFill>
                 <a:latin typeface="Helvetica"/>
               </a:rPr>
-              <a:t>Next.js static site, 17 routes, redeployed to GitHub Pages on every push; checked on iPhone (WebKit) and Pixel.</a:t>
+              <a:t>Next.js static site, 18 routes, redeployed to GitHub Pages on every push; checked on iPhone (WebKit) and Pixel.</a:t>
             </a:r>
           </a:p>
         </p:txBody>
@@ -7936,7 +8123,7 @@
                 </a:solidFill>
                 <a:latin typeface="Helvetica"/>
               </a:rPr>
-              <a:t>Midnight retired its hosted Preprod indexer; reads now go through Blockfrost.</a:t>
+              <a:t>Holders file claims with the claim kit; File with Lace proves locally, first finalized submit pending.</a:t>
             </a:r>
           </a:p>
         </p:txBody>
@@ -8087,7 +8274,7 @@
                 </a:solidFill>
                 <a:latin typeface="Helvetica"/>
               </a:rPr>
-              <a:t>Lace circuit-submit + ZK asset probe (verifier/zkir on Pages) for proveCover / fileClaim on /claim/evidence; Compact prove still needs midnight-js injection — claim kit files today.</a:t>
+              <a:t>First finalized File with Lace submit: the holder prove bridge already proves proveCover / fileClaim in about 1 s; Lace balances and submits.</a:t>
             </a:r>
           </a:p>
           <a:p>

--- a/docs/buildathon/PlutusShield-Wave2-deck.pptx
+++ b/docs/buildathon/PlutusShield-Wave2-deck.pptx
@@ -7343,7 +7343,7 @@
                 </a:solidFill>
                 <a:latin typeface="Georgia"/>
               </a:rPr>
-              <a:t>334 unit tests plus an end-to-end emulator run, all green.</a:t>
+              <a:t>344 unit tests plus an end-to-end emulator run, all green.</a:t>
             </a:r>
           </a:p>
         </p:txBody>
@@ -7469,7 +7469,7 @@
                 </a:solidFill>
                 <a:latin typeface="Georgia"/>
               </a:rPr>
-              <a:t>126</a:t>
+              <a:t>136</a:t>
             </a:r>
           </a:p>
         </p:txBody>
@@ -7511,7 +7511,7 @@
                 </a:solidFill>
                 <a:latin typeface="Helvetica"/>
               </a:rPr>
-              <a:t>SDK: quote engine, codecs, evidence vault, claim kit, Lace, prove bridge</a:t>
+              <a:t>SDK: quote engine, risk tiers, codecs, evidence vault, claim kit, Lace, prove bridge</a:t>
             </a:r>
           </a:p>
         </p:txBody>

--- a/docs/buildathon/PlutusShield-Wave2-deck.pptx
+++ b/docs/buildathon/PlutusShield-Wave2-deck.pptx
@@ -7343,7 +7343,7 @@
                 </a:solidFill>
                 <a:latin typeface="Georgia"/>
               </a:rPr>
-              <a:t>344 unit tests plus an end-to-end emulator run, all green.</a:t>
+              <a:t>348 unit tests plus an end-to-end emulator run, all green.</a:t>
             </a:r>
           </a:p>
         </p:txBody>
@@ -7469,7 +7469,7 @@
                 </a:solidFill>
                 <a:latin typeface="Georgia"/>
               </a:rPr>
-              <a:t>136</a:t>
+              <a:t>140</a:t>
             </a:r>
           </a:p>
         </p:txBody>
@@ -7511,7 +7511,7 @@
                 </a:solidFill>
                 <a:latin typeface="Helvetica"/>
               </a:rPr>
-              <a:t>SDK: quote engine, risk tiers, codecs, evidence vault, claim kit, Lace, prove bridge</a:t>
+              <a:t>SDK: quote engine, risk tiers, underwriting book, codecs, evidence vault, claim kit, Lace, prove bridge</a:t>
             </a:r>
           </a:p>
         </p:txBody>

--- a/docs/buildathon/PlutusShield-Wave2-deck.pptx
+++ b/docs/buildathon/PlutusShield-Wave2-deck.pptx
@@ -7343,7 +7343,7 @@
                 </a:solidFill>
                 <a:latin typeface="Georgia"/>
               </a:rPr>
-              <a:t>348 unit tests plus an end-to-end emulator run, all green.</a:t>
+              <a:t>354 unit tests plus an end-to-end emulator run, all green.</a:t>
             </a:r>
           </a:p>
         </p:txBody>
@@ -7469,7 +7469,7 @@
                 </a:solidFill>
                 <a:latin typeface="Georgia"/>
               </a:rPr>
-              <a:t>140</a:t>
+              <a:t>146</a:t>
             </a:r>
           </a:p>
         </p:txBody>

--- a/docs/buildathon/PlutusShield-Wave2-deck.pptx
+++ b/docs/buildathon/PlutusShield-Wave2-deck.pptx
@@ -7343,7 +7343,7 @@
                 </a:solidFill>
                 <a:latin typeface="Georgia"/>
               </a:rPr>
-              <a:t>354 unit tests plus an end-to-end emulator run, all green.</a:t>
+              <a:t>360 unit tests plus an end-to-end emulator run, all green.</a:t>
             </a:r>
           </a:p>
         </p:txBody>
@@ -7469,7 +7469,7 @@
                 </a:solidFill>
                 <a:latin typeface="Georgia"/>
               </a:rPr>
-              <a:t>146</a:t>
+              <a:t>152</a:t>
             </a:r>
           </a:p>
         </p:txBody>
@@ -7511,7 +7511,7 @@
                 </a:solidFill>
                 <a:latin typeface="Helvetica"/>
               </a:rPr>
-              <a:t>SDK: quote engine, risk tiers, underwriting book, codecs, evidence vault, claim kit, Lace, prove bridge</a:t>
+              <a:t>SDK: quote engine, risk tiers, underwriting book, open data, codecs, evidence vault, claim kit, Lace, prove bridge</a:t>
             </a:r>
           </a:p>
         </p:txBody>

--- a/docs/buildathon/PlutusShield-Wave2-deck.pptx
+++ b/docs/buildathon/PlutusShield-Wave2-deck.pptx
@@ -7343,7 +7343,7 @@
                 </a:solidFill>
                 <a:latin typeface="Georgia"/>
               </a:rPr>
-              <a:t>360 unit tests plus an end-to-end emulator run, all green.</a:t>
+              <a:t>367 unit tests plus an end-to-end emulator run, all green.</a:t>
             </a:r>
           </a:p>
         </p:txBody>
@@ -7469,7 +7469,7 @@
                 </a:solidFill>
                 <a:latin typeface="Georgia"/>
               </a:rPr>
-              <a:t>152</a:t>
+              <a:t>159</a:t>
             </a:r>
           </a:p>
         </p:txBody>
@@ -7511,7 +7511,7 @@
                 </a:solidFill>
                 <a:latin typeface="Helvetica"/>
               </a:rPr>
-              <a:t>SDK: quote engine, risk tiers, underwriting book, open data, codecs, evidence vault, claim kit, Lace, prove bridge</a:t>
+              <a:t>SDK: quote engine, risk tiers, underwriting book, open data, Atom feed, codecs, evidence vault, claim kit, Lace, prove bridge</a:t>
             </a:r>
           </a:p>
         </p:txBody>

--- a/docs/buildathon/PlutusShield-Wave2-deck.pptx
+++ b/docs/buildathon/PlutusShield-Wave2-deck.pptx
@@ -7343,7 +7343,7 @@
                 </a:solidFill>
                 <a:latin typeface="Georgia"/>
               </a:rPr>
-              <a:t>367 unit tests plus an end-to-end emulator run, all green.</a:t>
+              <a:t>375 unit tests plus an end-to-end emulator run, all green.</a:t>
             </a:r>
           </a:p>
         </p:txBody>
@@ -7469,7 +7469,7 @@
                 </a:solidFill>
                 <a:latin typeface="Georgia"/>
               </a:rPr>
-              <a:t>159</a:t>
+              <a:t>167</a:t>
             </a:r>
           </a:p>
         </p:txBody>
@@ -7511,7 +7511,7 @@
                 </a:solidFill>
                 <a:latin typeface="Helvetica"/>
               </a:rPr>
-              <a:t>SDK: quote engine, risk tiers, underwriting book, open data, Atom feed, codecs, evidence vault, claim kit, Lace, prove bridge</a:t>
+              <a:t>SDK: quote engine, cover planner, risk tiers, underwriting book, open data, Atom feed, codecs, evidence vault, claim kit, Lace, prove bridge</a:t>
             </a:r>
           </a:p>
         </p:txBody>

--- a/docs/buildathon/PlutusShield-Wave2-deck.pptx
+++ b/docs/buildathon/PlutusShield-Wave2-deck.pptx
@@ -7343,7 +7343,7 @@
                 </a:solidFill>
                 <a:latin typeface="Georgia"/>
               </a:rPr>
-              <a:t>375 unit tests plus an end-to-end emulator run, all green.</a:t>
+              <a:t>388 unit tests plus an end-to-end emulator run, all green.</a:t>
             </a:r>
           </a:p>
         </p:txBody>
@@ -7469,7 +7469,7 @@
                 </a:solidFill>
                 <a:latin typeface="Georgia"/>
               </a:rPr>
-              <a:t>167</a:t>
+              <a:t>180</a:t>
             </a:r>
           </a:p>
         </p:txBody>
@@ -7511,7 +7511,7 @@
                 </a:solidFill>
                 <a:latin typeface="Helvetica"/>
               </a:rPr>
-              <a:t>SDK: quote engine, cover planner, risk tiers, underwriting book, open data, Atom feed, codecs, evidence vault, claim kit, Lace, prove bridge</a:t>
+              <a:t>SDK: quote engine, cover planner + shareable plans, embeddable quote widget, risk tiers, underwriting book, open data, Atom feed, codecs, evidence vault, claim kit, Lace, prove bridge</a:t>
             </a:r>
           </a:p>
         </p:txBody>

--- a/docs/buildathon/PlutusShield-Wave2-deck.pptx
+++ b/docs/buildathon/PlutusShield-Wave2-deck.pptx
@@ -7343,7 +7343,7 @@
                 </a:solidFill>
                 <a:latin typeface="Georgia"/>
               </a:rPr>
-              <a:t>388 unit tests plus an end-to-end emulator run, all green.</a:t>
+              <a:t>396 unit tests plus an end-to-end emulator run, all green.</a:t>
             </a:r>
           </a:p>
         </p:txBody>
@@ -7469,7 +7469,7 @@
                 </a:solidFill>
                 <a:latin typeface="Georgia"/>
               </a:rPr>
-              <a:t>180</a:t>
+              <a:t>188</a:t>
             </a:r>
           </a:p>
         </p:txBody>
@@ -7511,7 +7511,7 @@
                 </a:solidFill>
                 <a:latin typeface="Helvetica"/>
               </a:rPr>
-              <a:t>SDK: quote engine, cover planner + shareable plans, embeddable quote widget, risk tiers, underwriting book, open data, Atom feed, codecs, evidence vault, claim kit, Lace, prove bridge</a:t>
+              <a:t>SDK: quote engine, cover planner + shareable plans, embeddable quote widget, policy deadline calendar, risk tiers, underwriting book, open data, Atom feed, codecs, evidence vault, claim kit, Lace, prove bridge</a:t>
             </a:r>
           </a:p>
         </p:txBody>

--- a/docs/buildathon/PlutusShield-Wave2-deck.pptx
+++ b/docs/buildathon/PlutusShield-Wave2-deck.pptx
@@ -7343,7 +7343,7 @@
                 </a:solidFill>
                 <a:latin typeface="Georgia"/>
               </a:rPr>
-              <a:t>396 unit tests plus an end-to-end emulator run, all green.</a:t>
+              <a:t>401 unit tests plus an end-to-end emulator run, all green.</a:t>
             </a:r>
           </a:p>
         </p:txBody>
@@ -7469,7 +7469,7 @@
                 </a:solidFill>
                 <a:latin typeface="Georgia"/>
               </a:rPr>
-              <a:t>188</a:t>
+              <a:t>193</a:t>
             </a:r>
           </a:p>
         </p:txBody>
@@ -7511,7 +7511,7 @@
                 </a:solidFill>
                 <a:latin typeface="Helvetica"/>
               </a:rPr>
-              <a:t>SDK: quote engine, cover planner + shareable plans, embeddable quote widget, policy deadline calendar, risk tiers, underwriting book, open data, Atom feed, codecs, evidence vault, claim kit, Lace, prove bridge</a:t>
+              <a:t>SDK: quote engine, cover wording, cover planner + shareable plans, embeddable quote widget, policy deadline calendar, risk tiers, underwriting book, open data, Atom feed, codecs, evidence vault, claim kit, Lace, prove bridge</a:t>
             </a:r>
           </a:p>
         </p:txBody>

--- a/docs/buildathon/PlutusShield-Wave2-deck.pptx
+++ b/docs/buildathon/PlutusShield-Wave2-deck.pptx
@@ -7343,7 +7343,7 @@
                 </a:solidFill>
                 <a:latin typeface="Georgia"/>
               </a:rPr>
-              <a:t>401 unit tests plus an end-to-end emulator run, all green.</a:t>
+              <a:t>409 unit tests plus an end-to-end emulator run, all green.</a:t>
             </a:r>
           </a:p>
         </p:txBody>
@@ -7469,7 +7469,7 @@
                 </a:solidFill>
                 <a:latin typeface="Georgia"/>
               </a:rPr>
-              <a:t>193</a:t>
+              <a:t>201</a:t>
             </a:r>
           </a:p>
         </p:txBody>
@@ -7511,7 +7511,7 @@
                 </a:solidFill>
                 <a:latin typeface="Helvetica"/>
               </a:rPr>
-              <a:t>SDK: quote engine, cover wording, cover planner + shareable plans, embeddable quote widget, policy deadline calendar, risk tiers, underwriting book, open data, Atom feed, codecs, evidence vault, claim kit, Lace, prove bridge</a:t>
+              <a:t>SDK: quote engine, cover wording, coverage certificate, cover planner + shareable plans, embeddable quote widget, policy deadline calendar, risk tiers, underwriting book, open data, Atom feed, codecs, evidence vault, claim kit, Lace, prove bridge</a:t>
             </a:r>
           </a:p>
         </p:txBody>

--- a/docs/buildathon/PlutusShield-Wave2-deck.pptx
+++ b/docs/buildathon/PlutusShield-Wave2-deck.pptx
@@ -7343,7 +7343,7 @@
                 </a:solidFill>
                 <a:latin typeface="Georgia"/>
               </a:rPr>
-              <a:t>409 unit tests plus an end-to-end emulator run, all green.</a:t>
+              <a:t>417 unit tests plus an end-to-end emulator run, all green.</a:t>
             </a:r>
           </a:p>
         </p:txBody>
@@ -7469,7 +7469,7 @@
                 </a:solidFill>
                 <a:latin typeface="Georgia"/>
               </a:rPr>
-              <a:t>201</a:t>
+              <a:t>209</a:t>
             </a:r>
           </a:p>
         </p:txBody>
@@ -7511,7 +7511,7 @@
                 </a:solidFill>
                 <a:latin typeface="Helvetica"/>
               </a:rPr>
-              <a:t>SDK: quote engine, cover wording, coverage certificate, cover planner + shareable plans, embeddable quote widget, policy deadline calendar, risk tiers, underwriting book, open data, Atom feed, codecs, evidence vault, claim kit, Lace, prove bridge</a:t>
+              <a:t>SDK: quote engine, cover wording, coverage certificate, premium receipt, cover planner + shareable plans, embeddable quote widget, policy deadline calendar, risk tiers, underwriting book, open data, Atom feed, codecs, evidence vault, claim kit, Lace, prove bridge</a:t>
             </a:r>
           </a:p>
         </p:txBody>
